--- a/docs/slides/Modulo 3/preview02_wetrade.pptx
+++ b/docs/slides/Modulo 3/preview02_wetrade.pptx
@@ -14,6 +14,8 @@
     <p:sldId id="262" r:id="rId13"/>
     <p:sldId id="263" r:id="rId14"/>
     <p:sldId id="264" r:id="rId15"/>
+    <p:sldId id="265" r:id="rId16"/>
+    <p:sldId id="266" r:id="rId17"/>
   </p:sldIdLst>
   <p:sldSz cx="12188952" cy="6858000" type="screen4x3"/>
   <p:notesSz cx="6858000" cy="9144000"/>
@@ -3284,6 +3286,1000 @@
             </a:pPr>
             <a:r>
               <a:t>Consorcio de 12 bancos europeos sobre Hyperledger Fabric</a:t>
+            </a:r>
+          </a:p>
+        </p:txBody>
+      </p:sp>
+    </p:spTree>
+  </p:cSld>
+  <p:clrMapOvr>
+    <a:masterClrMapping/>
+  </p:clrMapOvr>
+</p:sld>
+</file>
+
+<file path=ppt/slides/slide10.xml><?xml version="1.0" encoding="utf-8"?>
+<p:sld xmlns:a="http://schemas.openxmlformats.org/drawingml/2006/main" xmlns:p="http://schemas.openxmlformats.org/presentationml/2006/main" xmlns:r="http://schemas.openxmlformats.org/officeDocument/2006/relationships">
+  <p:cSld>
+    <p:spTree>
+      <p:nvGrpSpPr>
+        <p:cNvPr id="1" name=""/>
+        <p:cNvGrpSpPr/>
+        <p:nvPr/>
+      </p:nvGrpSpPr>
+      <p:grpSpPr/>
+      <p:sp>
+        <p:nvSpPr>
+          <p:cNvPr id="2" name="Rectangle 1"/>
+          <p:cNvSpPr/>
+          <p:nvPr/>
+        </p:nvSpPr>
+        <p:spPr>
+          <a:xfrm>
+            <a:off x="0" y="0"/>
+            <a:ext cx="12188952" cy="73152"/>
+          </a:xfrm>
+          <a:prstGeom prst="rect">
+            <a:avLst/>
+          </a:prstGeom>
+          <a:solidFill>
+            <a:srgbClr val="22627E"/>
+          </a:solidFill>
+          <a:ln>
+            <a:noFill/>
+          </a:ln>
+        </p:spPr>
+        <p:style>
+          <a:lnRef idx="1">
+            <a:schemeClr val="accent1"/>
+          </a:lnRef>
+          <a:fillRef idx="3">
+            <a:schemeClr val="accent1"/>
+          </a:fillRef>
+          <a:effectRef idx="2">
+            <a:schemeClr val="accent1"/>
+          </a:effectRef>
+          <a:fontRef idx="minor">
+            <a:schemeClr val="lt1"/>
+          </a:fontRef>
+        </p:style>
+        <p:txBody>
+          <a:bodyPr rtlCol="0" anchor="ctr"/>
+          <a:lstStyle/>
+          <a:p>
+            <a:pPr algn="ctr"/>
+          </a:p>
+        </p:txBody>
+      </p:sp>
+      <p:sp>
+        <p:nvSpPr>
+          <p:cNvPr id="3" name="TextBox 2"/>
+          <p:cNvSpPr txBox="1"/>
+          <p:nvPr/>
+        </p:nvSpPr>
+        <p:spPr>
+          <a:xfrm>
+            <a:off x="457200" y="274320"/>
+            <a:ext cx="10972800" cy="731520"/>
+          </a:xfrm>
+          <a:prstGeom prst="rect">
+            <a:avLst/>
+          </a:prstGeom>
+          <a:noFill/>
+        </p:spPr>
+        <p:txBody>
+          <a:bodyPr wrap="square"/>
+          <a:lstStyle/>
+          <a:p>
+            <a:pPr algn="l">
+              <a:defRPr sz="3200" b="1">
+                <a:solidFill>
+                  <a:srgbClr val="22627E"/>
+                </a:solidFill>
+                <a:latin typeface="Calibri"/>
+              </a:defRPr>
+            </a:pPr>
+            <a:r>
+              <a:t>Respuestas a las preguntas clave</a:t>
+            </a:r>
+          </a:p>
+        </p:txBody>
+      </p:sp>
+      <p:sp>
+        <p:nvSpPr>
+          <p:cNvPr id="4" name="Rectangle 3"/>
+          <p:cNvSpPr/>
+          <p:nvPr/>
+        </p:nvSpPr>
+        <p:spPr>
+          <a:xfrm>
+            <a:off x="457200" y="1051560"/>
+            <a:ext cx="10972800" cy="27432"/>
+          </a:xfrm>
+          <a:prstGeom prst="rect">
+            <a:avLst/>
+          </a:prstGeom>
+          <a:solidFill>
+            <a:srgbClr val="22627E"/>
+          </a:solidFill>
+          <a:ln>
+            <a:noFill/>
+          </a:ln>
+        </p:spPr>
+        <p:style>
+          <a:lnRef idx="1">
+            <a:schemeClr val="accent1"/>
+          </a:lnRef>
+          <a:fillRef idx="3">
+            <a:schemeClr val="accent1"/>
+          </a:fillRef>
+          <a:effectRef idx="2">
+            <a:schemeClr val="accent1"/>
+          </a:effectRef>
+          <a:fontRef idx="minor">
+            <a:schemeClr val="lt1"/>
+          </a:fontRef>
+        </p:style>
+        <p:txBody>
+          <a:bodyPr rtlCol="0" anchor="ctr"/>
+          <a:lstStyle/>
+          <a:p>
+            <a:pPr algn="ctr"/>
+          </a:p>
+        </p:txBody>
+      </p:sp>
+      <p:sp>
+        <p:nvSpPr>
+          <p:cNvPr id="5" name="TextBox 4"/>
+          <p:cNvSpPr txBox="1"/>
+          <p:nvPr/>
+        </p:nvSpPr>
+        <p:spPr>
+          <a:xfrm>
+            <a:off x="640080" y="1280160"/>
+            <a:ext cx="10515600" cy="5029200"/>
+          </a:xfrm>
+          <a:prstGeom prst="rect">
+            <a:avLst/>
+          </a:prstGeom>
+          <a:noFill/>
+        </p:spPr>
+        <p:txBody>
+          <a:bodyPr wrap="square">
+            <a:spAutoFit/>
+          </a:bodyPr>
+          <a:lstStyle/>
+          <a:p>
+            <a:pPr>
+              <a:spcAft>
+                <a:spcPts val="800"/>
+              </a:spcAft>
+              <a:defRPr sz="2000">
+                <a:solidFill>
+                  <a:srgbClr val="333333"/>
+                </a:solidFill>
+                <a:latin typeface="Calibri"/>
+              </a:defRPr>
+            </a:pPr>
+            <a:r>
+              <a:t>1. ¿Las PYMEs: orgs o usuarios?</a:t>
+            </a:r>
+          </a:p>
+          <a:p>
+            <a:pPr lvl="1">
+              <a:spcAft>
+                <a:spcPts val="400"/>
+              </a:spcAft>
+              <a:defRPr sz="1700">
+                <a:solidFill>
+                  <a:srgbClr val="666666"/>
+                </a:solidFill>
+                <a:latin typeface="Calibri"/>
+              </a:defRPr>
+            </a:pPr>
+            <a:r>
+              <a:t>    Usuarios de los bancos (cert X.509 con role=client emitido por el banco).</a:t>
+            </a:r>
+          </a:p>
+          <a:p>
+            <a:pPr lvl="1">
+              <a:spcAft>
+                <a:spcPts val="400"/>
+              </a:spcAft>
+              <a:defRPr sz="1700">
+                <a:solidFill>
+                  <a:srgbClr val="666666"/>
+                </a:solidFill>
+                <a:latin typeface="Calibri"/>
+              </a:defRPr>
+            </a:pPr>
+            <a:r>
+              <a:t>    Hacer orgs a cada PYME seria inviable: miles/millones de orgs.</a:t>
+            </a:r>
+          </a:p>
+          <a:p>
+            <a:pPr>
+              <a:spcAft>
+                <a:spcPts val="800"/>
+              </a:spcAft>
+              <a:defRPr sz="2000">
+                <a:solidFill>
+                  <a:srgbClr val="333333"/>
+                </a:solidFill>
+                <a:latin typeface="Calibri"/>
+              </a:defRPr>
+            </a:pPr>
+            <a:r>
+              <a:t>2. ¿Un canal o canales por pareja de bancos?</a:t>
+            </a:r>
+          </a:p>
+          <a:p>
+            <a:pPr lvl="1">
+              <a:spcAft>
+                <a:spcPts val="400"/>
+              </a:spcAft>
+              <a:defRPr sz="1700">
+                <a:solidFill>
+                  <a:srgbClr val="666666"/>
+                </a:solidFill>
+                <a:latin typeface="Calibri"/>
+              </a:defRPr>
+            </a:pPr>
+            <a:r>
+              <a:t>    Un canal compartido con Private Data Collections por pareja de bancos.</a:t>
+            </a:r>
+          </a:p>
+          <a:p>
+            <a:pPr lvl="1">
+              <a:spcAft>
+                <a:spcPts val="400"/>
+              </a:spcAft>
+              <a:defRPr sz="1700">
+                <a:solidFill>
+                  <a:srgbClr val="666666"/>
+                </a:solidFill>
+                <a:latin typeface="Calibri"/>
+              </a:defRPr>
+            </a:pPr>
+            <a:r>
+              <a:t>    Permite detectar fraudes transversales (doble financiacion, lavado).</a:t>
+            </a:r>
+          </a:p>
+          <a:p>
+            <a:pPr>
+              <a:spcAft>
+                <a:spcPts val="800"/>
+              </a:spcAft>
+              <a:defRPr sz="2000">
+                <a:solidFill>
+                  <a:srgbClr val="333333"/>
+                </a:solidFill>
+                <a:latin typeface="Calibri"/>
+              </a:defRPr>
+            </a:pPr>
+            <a:r>
+              <a:t>3. ¿Importes y datos sensibles?</a:t>
+            </a:r>
+          </a:p>
+          <a:p>
+            <a:pPr lvl="1">
+              <a:spcAft>
+                <a:spcPts val="400"/>
+              </a:spcAft>
+              <a:defRPr sz="1700">
+                <a:solidFill>
+                  <a:srgbClr val="666666"/>
+                </a:solidFill>
+                <a:latin typeface="Calibri"/>
+              </a:defRPr>
+            </a:pPr>
+            <a:r>
+              <a:t>    Private Data Collections por pareja de bancos involucrados.</a:t>
+            </a:r>
+          </a:p>
+          <a:p>
+            <a:pPr lvl="1">
+              <a:spcAft>
+                <a:spcPts val="400"/>
+              </a:spcAft>
+              <a:defRPr sz="1700">
+                <a:solidFill>
+                  <a:srgbClr val="666666"/>
+                </a:solidFill>
+                <a:latin typeface="Calibri"/>
+              </a:defRPr>
+            </a:pPr>
+            <a:r>
+              <a:t>    Solo los 2 bancos ven el importe; los demas solo ven el hash.</a:t>
+            </a:r>
+          </a:p>
+          <a:p>
+            <a:pPr>
+              <a:spcAft>
+                <a:spcPts val="800"/>
+              </a:spcAft>
+              <a:defRPr sz="2000">
+                <a:solidFill>
+                  <a:srgbClr val="333333"/>
+                </a:solidFill>
+                <a:latin typeface="Calibri"/>
+              </a:defRPr>
+            </a:pPr>
+            <a:r>
+              <a:t>4. Estados de una operacion:</a:t>
+            </a:r>
+          </a:p>
+          <a:p>
+            <a:pPr lvl="1">
+              <a:spcAft>
+                <a:spcPts val="400"/>
+              </a:spcAft>
+              <a:defRPr sz="1700">
+                <a:solidFill>
+                  <a:srgbClr val="666666"/>
+                </a:solidFill>
+                <a:latin typeface="Calibri"/>
+              </a:defRPr>
+            </a:pPr>
+            <a:r>
+              <a:t>    proposed -&gt; approved -&gt; in_transit -&gt; delivered -&gt; paid</a:t>
+            </a:r>
+          </a:p>
+          <a:p>
+            <a:pPr lvl="1">
+              <a:spcAft>
+                <a:spcPts val="400"/>
+              </a:spcAft>
+              <a:defRPr sz="1700">
+                <a:solidFill>
+                  <a:srgbClr val="666666"/>
+                </a:solidFill>
+                <a:latin typeface="Calibri"/>
+              </a:defRPr>
+            </a:pPr>
+            <a:r>
+              <a:t>    Con transicion rechazada / disputa en cualquier punto.</a:t>
+            </a:r>
+          </a:p>
+          <a:p>
+            <a:pPr>
+              <a:spcAft>
+                <a:spcPts val="800"/>
+              </a:spcAft>
+              <a:defRPr sz="2000">
+                <a:solidFill>
+                  <a:srgbClr val="333333"/>
+                </a:solidFill>
+                <a:latin typeface="Calibri"/>
+              </a:defRPr>
+            </a:pPr>
+            <a:r>
+              <a:t>5. Politicas de endorsement (crear vs liberar pago):</a:t>
+            </a:r>
+          </a:p>
+          <a:p>
+            <a:pPr lvl="1">
+              <a:spcAft>
+                <a:spcPts val="400"/>
+              </a:spcAft>
+              <a:defRPr sz="1700">
+                <a:solidFill>
+                  <a:srgbClr val="666666"/>
+                </a:solidFill>
+                <a:latin typeface="Calibri"/>
+              </a:defRPr>
+            </a:pPr>
+            <a:r>
+              <a:t>    Crear operacion: AND(BancoVendedor, BancoComprador).</a:t>
+            </a:r>
+          </a:p>
+          <a:p>
+            <a:pPr lvl="1">
+              <a:spcAft>
+                <a:spcPts val="400"/>
+              </a:spcAft>
+              <a:defRPr sz="1700">
+                <a:solidFill>
+                  <a:srgbClr val="666666"/>
+                </a:solidFill>
+                <a:latin typeface="Calibri"/>
+              </a:defRPr>
+            </a:pPr>
+            <a:r>
+              <a:t>    Liberar pago: AND(BancoVendedor, BancoComprador) + verificar status='delivered'.</a:t>
+            </a:r>
+          </a:p>
+          <a:p>
+            <a:pPr>
+              <a:spcAft>
+                <a:spcPts val="800"/>
+              </a:spcAft>
+              <a:defRPr sz="2000">
+                <a:solidFill>
+                  <a:srgbClr val="333333"/>
+                </a:solidFill>
+                <a:latin typeface="Calibri"/>
+              </a:defRPr>
+            </a:pPr>
+            <a:r>
+              <a:t>6. ¿BCE en el canal?</a:t>
+            </a:r>
+          </a:p>
+          <a:p>
+            <a:pPr lvl="1">
+              <a:spcAft>
+                <a:spcPts val="400"/>
+              </a:spcAft>
+              <a:defRPr sz="1700">
+                <a:solidFill>
+                  <a:srgbClr val="666666"/>
+                </a:solidFill>
+                <a:latin typeface="Calibri"/>
+              </a:defRPr>
+            </a:pPr>
+            <a:r>
+              <a:t>    Si como org de auditoria (solo lectura), NO como endorser.</a:t>
+            </a:r>
+          </a:p>
+          <a:p>
+            <a:pPr lvl="1">
+              <a:spcAft>
+                <a:spcPts val="400"/>
+              </a:spcAft>
+              <a:defRPr sz="1700">
+                <a:solidFill>
+                  <a:srgbClr val="666666"/>
+                </a:solidFill>
+                <a:latin typeface="Calibri"/>
+              </a:defRPr>
+            </a:pPr>
+            <a:r>
+              <a:t>    Evita que el regulador pueda bloquear operaciones comerciales.</a:t>
+            </a:r>
+          </a:p>
+          <a:p>
+            <a:pPr>
+              <a:spcAft>
+                <a:spcPts val="800"/>
+              </a:spcAft>
+              <a:defRPr sz="2000">
+                <a:solidFill>
+                  <a:srgbClr val="333333"/>
+                </a:solidFill>
+                <a:latin typeface="Calibri"/>
+              </a:defRPr>
+            </a:pPr>
+            <a:r>
+              <a:t>7. ¿Escala N*(N-1)/2 Private Data Collections?</a:t>
+            </a:r>
+          </a:p>
+          <a:p>
+            <a:pPr lvl="1">
+              <a:spcAft>
+                <a:spcPts val="400"/>
+              </a:spcAft>
+              <a:defRPr sz="1700">
+                <a:solidFill>
+                  <a:srgbClr val="666666"/>
+                </a:solidFill>
+                <a:latin typeface="Calibri"/>
+              </a:defRPr>
+            </a:pPr>
+            <a:r>
+              <a:t>    No escala para N grandes: con 50 bancos son 1225 PDCs.</a:t>
+            </a:r>
+          </a:p>
+          <a:p>
+            <a:pPr lvl="1">
+              <a:spcAft>
+                <a:spcPts val="400"/>
+              </a:spcAft>
+              <a:defRPr sz="1700">
+                <a:solidFill>
+                  <a:srgbClr val="666666"/>
+                </a:solidFill>
+                <a:latin typeface="Calibri"/>
+              </a:defRPr>
+            </a:pPr>
+            <a:r>
+              <a:t>    Alternativa: state-based endorsement dinamico por operacion.</a:t>
+            </a:r>
+          </a:p>
+          <a:p>
+            <a:pPr lvl="1">
+              <a:spcAft>
+                <a:spcPts val="400"/>
+              </a:spcAft>
+              <a:defRPr sz="1700">
+                <a:solidFill>
+                  <a:srgbClr val="666666"/>
+                </a:solidFill>
+                <a:latin typeface="Calibri"/>
+              </a:defRPr>
+            </a:pPr>
+            <a:r>
+              <a:t>    We.Trade llego al limite con 12 bancos — esto contribuyo al cierre.</a:t>
+            </a:r>
+          </a:p>
+        </p:txBody>
+      </p:sp>
+    </p:spTree>
+  </p:cSld>
+  <p:clrMapOvr>
+    <a:masterClrMapping/>
+  </p:clrMapOvr>
+</p:sld>
+</file>
+
+<file path=ppt/slides/slide11.xml><?xml version="1.0" encoding="utf-8"?>
+<p:sld xmlns:a="http://schemas.openxmlformats.org/drawingml/2006/main" xmlns:p="http://schemas.openxmlformats.org/presentationml/2006/main" xmlns:r="http://schemas.openxmlformats.org/officeDocument/2006/relationships">
+  <p:cSld>
+    <p:spTree>
+      <p:nvGrpSpPr>
+        <p:cNvPr id="1" name=""/>
+        <p:cNvGrpSpPr/>
+        <p:nvPr/>
+      </p:nvGrpSpPr>
+      <p:grpSpPr/>
+      <p:sp>
+        <p:nvSpPr>
+          <p:cNvPr id="2" name="Rectangle 1"/>
+          <p:cNvSpPr/>
+          <p:nvPr/>
+        </p:nvSpPr>
+        <p:spPr>
+          <a:xfrm>
+            <a:off x="0" y="0"/>
+            <a:ext cx="12188952" cy="73152"/>
+          </a:xfrm>
+          <a:prstGeom prst="rect">
+            <a:avLst/>
+          </a:prstGeom>
+          <a:solidFill>
+            <a:srgbClr val="22627E"/>
+          </a:solidFill>
+          <a:ln>
+            <a:noFill/>
+          </a:ln>
+        </p:spPr>
+        <p:style>
+          <a:lnRef idx="1">
+            <a:schemeClr val="accent1"/>
+          </a:lnRef>
+          <a:fillRef idx="3">
+            <a:schemeClr val="accent1"/>
+          </a:fillRef>
+          <a:effectRef idx="2">
+            <a:schemeClr val="accent1"/>
+          </a:effectRef>
+          <a:fontRef idx="minor">
+            <a:schemeClr val="lt1"/>
+          </a:fontRef>
+        </p:style>
+        <p:txBody>
+          <a:bodyPr rtlCol="0" anchor="ctr"/>
+          <a:lstStyle/>
+          <a:p>
+            <a:pPr algn="ctr"/>
+          </a:p>
+        </p:txBody>
+      </p:sp>
+      <p:sp>
+        <p:nvSpPr>
+          <p:cNvPr id="3" name="TextBox 2"/>
+          <p:cNvSpPr txBox="1"/>
+          <p:nvPr/>
+        </p:nvSpPr>
+        <p:spPr>
+          <a:xfrm>
+            <a:off x="457200" y="274320"/>
+            <a:ext cx="10972800" cy="731520"/>
+          </a:xfrm>
+          <a:prstGeom prst="rect">
+            <a:avLst/>
+          </a:prstGeom>
+          <a:noFill/>
+        </p:spPr>
+        <p:txBody>
+          <a:bodyPr wrap="square"/>
+          <a:lstStyle/>
+          <a:p>
+            <a:pPr algn="l">
+              <a:defRPr sz="3200" b="1">
+                <a:solidFill>
+                  <a:srgbClr val="22627E"/>
+                </a:solidFill>
+                <a:latin typeface="Calibri"/>
+              </a:defRPr>
+            </a:pPr>
+            <a:r>
+              <a:t>Respuestas al debate</a:t>
+            </a:r>
+          </a:p>
+        </p:txBody>
+      </p:sp>
+      <p:sp>
+        <p:nvSpPr>
+          <p:cNvPr id="4" name="Rectangle 3"/>
+          <p:cNvSpPr/>
+          <p:nvPr/>
+        </p:nvSpPr>
+        <p:spPr>
+          <a:xfrm>
+            <a:off x="457200" y="1051560"/>
+            <a:ext cx="10972800" cy="27432"/>
+          </a:xfrm>
+          <a:prstGeom prst="rect">
+            <a:avLst/>
+          </a:prstGeom>
+          <a:solidFill>
+            <a:srgbClr val="22627E"/>
+          </a:solidFill>
+          <a:ln>
+            <a:noFill/>
+          </a:ln>
+        </p:spPr>
+        <p:style>
+          <a:lnRef idx="1">
+            <a:schemeClr val="accent1"/>
+          </a:lnRef>
+          <a:fillRef idx="3">
+            <a:schemeClr val="accent1"/>
+          </a:fillRef>
+          <a:effectRef idx="2">
+            <a:schemeClr val="accent1"/>
+          </a:effectRef>
+          <a:fontRef idx="minor">
+            <a:schemeClr val="lt1"/>
+          </a:fontRef>
+        </p:style>
+        <p:txBody>
+          <a:bodyPr rtlCol="0" anchor="ctr"/>
+          <a:lstStyle/>
+          <a:p>
+            <a:pPr algn="ctr"/>
+          </a:p>
+        </p:txBody>
+      </p:sp>
+      <p:sp>
+        <p:nvSpPr>
+          <p:cNvPr id="5" name="TextBox 4"/>
+          <p:cNvSpPr txBox="1"/>
+          <p:nvPr/>
+        </p:nvSpPr>
+        <p:spPr>
+          <a:xfrm>
+            <a:off x="640080" y="1280160"/>
+            <a:ext cx="10515600" cy="5029200"/>
+          </a:xfrm>
+          <a:prstGeom prst="rect">
+            <a:avLst/>
+          </a:prstGeom>
+          <a:noFill/>
+        </p:spPr>
+        <p:txBody>
+          <a:bodyPr wrap="square">
+            <a:spAutoFit/>
+          </a:bodyPr>
+          <a:lstStyle/>
+          <a:p>
+            <a:pPr>
+              <a:spcAft>
+                <a:spcPts val="800"/>
+              </a:spcAft>
+              <a:defRPr sz="2000">
+                <a:solidFill>
+                  <a:srgbClr val="333333"/>
+                </a:solidFill>
+                <a:latin typeface="Calibri"/>
+              </a:defRPr>
+            </a:pPr>
+            <a:r>
+              <a:t>1. ¿Por que cerro We.Trade a pesar de tener 12 bancos?</a:t>
+            </a:r>
+          </a:p>
+          <a:p>
+            <a:pPr lvl="1">
+              <a:spcAft>
+                <a:spcPts val="400"/>
+              </a:spcAft>
+              <a:defRPr sz="1700">
+                <a:solidFill>
+                  <a:srgbClr val="666666"/>
+                </a:solidFill>
+                <a:latin typeface="Calibri"/>
+              </a:defRPr>
+            </a:pPr>
+            <a:r>
+              <a:t>    Problema de modelo de negocio: nadie queria financiar indefinidamente.</a:t>
+            </a:r>
+          </a:p>
+          <a:p>
+            <a:pPr lvl="1">
+              <a:spcAft>
+                <a:spcPts val="400"/>
+              </a:spcAft>
+              <a:defRPr sz="1700">
+                <a:solidFill>
+                  <a:srgbClr val="666666"/>
+                </a:solidFill>
+                <a:latin typeface="Calibri"/>
+              </a:defRPr>
+            </a:pPr>
+            <a:r>
+              <a:t>    Los miembros querian participar pero no pagar cuotas sostenidas.</a:t>
+            </a:r>
+          </a:p>
+          <a:p>
+            <a:pPr lvl="1">
+              <a:spcAft>
+                <a:spcPts val="400"/>
+              </a:spcAft>
+              <a:defRPr sz="1700">
+                <a:solidFill>
+                  <a:srgbClr val="666666"/>
+                </a:solidFill>
+                <a:latin typeface="Calibri"/>
+              </a:defRPr>
+            </a:pPr>
+            <a:r>
+              <a:t>    Faltaba un flujo de ingresos recurrente ligado al uso real.</a:t>
+            </a:r>
+          </a:p>
+          <a:p>
+            <a:pPr>
+              <a:spcAft>
+                <a:spcPts val="800"/>
+              </a:spcAft>
+              <a:defRPr sz="2000">
+                <a:solidFill>
+                  <a:srgbClr val="333333"/>
+                </a:solidFill>
+                <a:latin typeface="Calibri"/>
+              </a:defRPr>
+            </a:pPr>
+            <a:r>
+              <a:t>2. ¿Que modelo de ingresos propondriais?</a:t>
+            </a:r>
+          </a:p>
+          <a:p>
+            <a:pPr lvl="1">
+              <a:spcAft>
+                <a:spcPts val="400"/>
+              </a:spcAft>
+              <a:defRPr sz="1700">
+                <a:solidFill>
+                  <a:srgbClr val="666666"/>
+                </a:solidFill>
+                <a:latin typeface="Calibri"/>
+              </a:defRPr>
+            </a:pPr>
+            <a:r>
+              <a:t>    Fees por transaccion: 0.1-0.5% del importe financiado.</a:t>
+            </a:r>
+          </a:p>
+          <a:p>
+            <a:pPr lvl="1">
+              <a:spcAft>
+                <a:spcPts val="400"/>
+              </a:spcAft>
+              <a:defRPr sz="1700">
+                <a:solidFill>
+                  <a:srgbClr val="666666"/>
+                </a:solidFill>
+                <a:latin typeface="Calibri"/>
+              </a:defRPr>
+            </a:pPr>
+            <a:r>
+              <a:t>    Cuota anual escalada: pequenos bancos pagan menos que grandes.</a:t>
+            </a:r>
+          </a:p>
+          <a:p>
+            <a:pPr lvl="1">
+              <a:spcAft>
+                <a:spcPts val="400"/>
+              </a:spcAft>
+              <a:defRPr sz="1700">
+                <a:solidFill>
+                  <a:srgbClr val="666666"/>
+                </a:solidFill>
+                <a:latin typeface="Calibri"/>
+              </a:defRPr>
+            </a:pPr>
+            <a:r>
+              <a:t>    Modelo hibrido: fee por uso + cuota minima para cubrir infra.</a:t>
+            </a:r>
+          </a:p>
+          <a:p>
+            <a:pPr>
+              <a:spcAft>
+                <a:spcPts val="800"/>
+              </a:spcAft>
+              <a:defRPr sz="2000">
+                <a:solidFill>
+                  <a:srgbClr val="333333"/>
+                </a:solidFill>
+                <a:latin typeface="Calibri"/>
+              </a:defRPr>
+            </a:pPr>
+            <a:r>
+              <a:t>3. ¿PYMEs como usuarios tiene sentido?</a:t>
+            </a:r>
+          </a:p>
+          <a:p>
+            <a:pPr lvl="1">
+              <a:spcAft>
+                <a:spcPts val="400"/>
+              </a:spcAft>
+              <a:defRPr sz="1700">
+                <a:solidFill>
+                  <a:srgbClr val="666666"/>
+                </a:solidFill>
+                <a:latin typeface="Calibri"/>
+              </a:defRPr>
+            </a:pPr>
+            <a:r>
+              <a:t>    Si — las PYMEs son clientes de los bancos, no actores de la red.</a:t>
+            </a:r>
+          </a:p>
+          <a:p>
+            <a:pPr lvl="1">
+              <a:spcAft>
+                <a:spcPts val="400"/>
+              </a:spcAft>
+              <a:defRPr sz="1700">
+                <a:solidFill>
+                  <a:srgbClr val="666666"/>
+                </a:solidFill>
+                <a:latin typeface="Calibri"/>
+              </a:defRPr>
+            </a:pPr>
+            <a:r>
+              <a:t>    Ventaja: escala infinita sin anadir orgs.</a:t>
+            </a:r>
+          </a:p>
+          <a:p>
+            <a:pPr lvl="1">
+              <a:spcAft>
+                <a:spcPts val="400"/>
+              </a:spcAft>
+              <a:defRPr sz="1700">
+                <a:solidFill>
+                  <a:srgbClr val="666666"/>
+                </a:solidFill>
+                <a:latin typeface="Calibri"/>
+              </a:defRPr>
+            </a:pPr>
+            <a:r>
+              <a:t>    Cambia: la identidad de la PYME la emite su banco, que es responsable.</a:t>
+            </a:r>
+          </a:p>
+          <a:p>
+            <a:pPr>
+              <a:spcAft>
+                <a:spcPts val="800"/>
+              </a:spcAft>
+              <a:defRPr sz="2000">
+                <a:solidFill>
+                  <a:srgbClr val="333333"/>
+                </a:solidFill>
+                <a:latin typeface="Calibri"/>
+              </a:defRPr>
+            </a:pPr>
+            <a:r>
+              <a:t>4. PYME cambia de banco: ¿y su historial?</a:t>
+            </a:r>
+          </a:p>
+          <a:p>
+            <a:pPr lvl="1">
+              <a:spcAft>
+                <a:spcPts val="400"/>
+              </a:spcAft>
+              <a:defRPr sz="1700">
+                <a:solidFill>
+                  <a:srgbClr val="666666"/>
+                </a:solidFill>
+                <a:latin typeface="Calibri"/>
+              </a:defRPr>
+            </a:pPr>
+            <a:r>
+              <a:t>    Su historial queda en el ledger (asociado a cert viejo).</a:t>
+            </a:r>
+          </a:p>
+          <a:p>
+            <a:pPr lvl="1">
+              <a:spcAft>
+                <a:spcPts val="400"/>
+              </a:spcAft>
+              <a:defRPr sz="1700">
+                <a:solidFill>
+                  <a:srgbClr val="666666"/>
+                </a:solidFill>
+                <a:latin typeface="Calibri"/>
+              </a:defRPr>
+            </a:pPr>
+            <a:r>
+              <a:t>    El nuevo banco emite un cert nuevo con el mismo ID (p.ej. CIF).</a:t>
+            </a:r>
+          </a:p>
+          <a:p>
+            <a:pPr lvl="1">
+              <a:spcAft>
+                <a:spcPts val="400"/>
+              </a:spcAft>
+              <a:defRPr sz="1700">
+                <a:solidFill>
+                  <a:srgbClr val="666666"/>
+                </a:solidFill>
+                <a:latin typeface="Calibri"/>
+              </a:defRPr>
+            </a:pPr>
+            <a:r>
+              <a:t>    Funcion admin: 'link_identity(old_cert_hash, new_cert)' — auditada.</a:t>
+            </a:r>
+          </a:p>
+          <a:p>
+            <a:pPr>
+              <a:spcAft>
+                <a:spcPts val="800"/>
+              </a:spcAft>
+              <a:defRPr sz="2000">
+                <a:solidFill>
+                  <a:srgbClr val="333333"/>
+                </a:solidFill>
+                <a:latin typeface="Calibri"/>
+              </a:defRPr>
+            </a:pPr>
+            <a:r>
+              <a:t>5. ¿Regulador (BCE) en el canal como HKMA?</a:t>
+            </a:r>
+          </a:p>
+          <a:p>
+            <a:pPr lvl="1">
+              <a:spcAft>
+                <a:spcPts val="400"/>
+              </a:spcAft>
+              <a:defRPr sz="1700">
+                <a:solidFill>
+                  <a:srgbClr val="666666"/>
+                </a:solidFill>
+                <a:latin typeface="Calibri"/>
+              </a:defRPr>
+            </a:pPr>
+            <a:r>
+              <a:t>    Ventajas: supervision en tiempo real, deteccion temprana de fraude.</a:t>
+            </a:r>
+          </a:p>
+          <a:p>
+            <a:pPr lvl="1">
+              <a:spcAft>
+                <a:spcPts val="400"/>
+              </a:spcAft>
+              <a:defRPr sz="1700">
+                <a:solidFill>
+                  <a:srgbClr val="666666"/>
+                </a:solidFill>
+                <a:latin typeface="Calibri"/>
+              </a:defRPr>
+            </a:pPr>
+            <a:r>
+              <a:t>    Riesgos: concentracion de informacion, GDPR, privacidad bancaria.</a:t>
+            </a:r>
+          </a:p>
+          <a:p>
+            <a:pPr lvl="1">
+              <a:spcAft>
+                <a:spcPts val="400"/>
+              </a:spcAft>
+              <a:defRPr sz="1700">
+                <a:solidFill>
+                  <a:srgbClr val="666666"/>
+                </a:solidFill>
+                <a:latin typeface="Calibri"/>
+              </a:defRPr>
+            </a:pPr>
+            <a:r>
+              <a:t>    Compromise: BCE como org con acceso de SOLO LECTURA en un canal auxiliar.</a:t>
             </a:r>
           </a:p>
         </p:txBody>
